--- a/decks/triple-space/triple-space_ch1_solar-system.pptx
+++ b/decks/triple-space/triple-space_ch1_solar-system.pptx
@@ -125,30 +125,30 @@
   <p:extLst>
     <p:ext uri="{521415D9-36F7-43E2-AB2F-B90AF26B5E84}">
       <p14:sectionLst xmlns:p14="http://schemas.microsoft.com/office/powerpoint/2010/main">
-        <p14:section name="Opening" id="{f0a02949-6ffa-d4b0-2e4c-9d8c558a917e}">
+        <p14:section name="Opening" id="{553fb544-2ef1-1b1f-93ae-8d9fd8879055}">
           <p14:sldIdLst>
             <p14:sldId id="256"/>
           </p14:sldIdLst>
         </p14:section>
-        <p14:section name="Gate" id="{e6648505-e614-3323-20ba-00bd93da02f0}">
+        <p14:section name="Gate" id="{2f4a5663-9a5e-21f2-082f-f1aed4f2395d}">
           <p14:sldIdLst>
             <p14:sldId id="257"/>
             <p14:sldId id="258"/>
           </p14:sldIdLst>
         </p14:section>
-        <p14:section name="Pre-teach" id="{77e70196-1fd0-cc0f-0175-a0d6659c09c2}">
+        <p14:section name="Pre-teach" id="{c601ee16-2c35-27b1-c34b-a75aad95bb61}">
           <p14:sldIdLst>
             <p14:sldId id="259"/>
             <p14:sldId id="260"/>
           </p14:sldIdLst>
         </p14:section>
-        <p14:section name="Read-along" id="{be85d110-8348-19cf-901f-80277b3a9fc4}">
+        <p14:section name="Read-along" id="{94f0cc32-feac-2b40-dac5-cd448848830a}">
           <p14:sldIdLst>
             <p14:sldId id="261"/>
             <p14:sldId id="262"/>
           </p14:sldIdLst>
         </p14:section>
-        <p14:section name="Teach" id="{1d143c5a-e5b3-cd23-d9dc-1885400331ec}">
+        <p14:section name="Teach" id="{12d463d0-e654-2065-4635-66e1550a884f}">
           <p14:sldIdLst>
             <p14:sldId id="263"/>
             <p14:sldId id="264"/>
@@ -156,7 +156,7 @@
             <p14:sldId id="266"/>
           </p14:sldIdLst>
         </p14:section>
-        <p14:section name="Routes" id="{617d43ef-2237-9910-1c2d-dd425a5d94f6}">
+        <p14:section name="Routes" id="{ae7a883b-24a8-206c-1a6d-64d7e6b5d21d}">
           <p14:sldIdLst>
             <p14:sldId id="267"/>
             <p14:sldId id="268"/>
@@ -164,12 +164,12 @@
             <p14:sldId id="270"/>
           </p14:sldIdLst>
         </p14:section>
-        <p14:section name="Close" id="{a93566eb-872b-1153-b8ec-3829c0f82e5b}">
+        <p14:section name="Close" id="{b1663b6c-c252-7241-9eaa-86ba7d28be4b}">
           <p14:sldIdLst>
             <p14:sldId id="271"/>
           </p14:sldIdLst>
         </p14:section>
-        <p14:section name="Answers" id="{fb9cec82-baf2-0046-540d-c55845822ea0}">
+        <p14:section name="Answers" id="{cd92ac39-3b4a-c756-778e-1908dc60bdc3}">
           <p14:sldIdLst>
             <p14:sldId id="272"/>
             <p14:sldId id="273"/>
@@ -1232,9 +1232,10 @@
             <a:r>
               <a:rPr lang="en-US" dirty="0"/>
               <a:t>Exit ticket — individual, silent, on a slip or mini-whiteboard. Recall before help: no notes, no lanes, no hints. Collect before pupils leave.
-Question: Match each object to what it is.
-Answer: The Sun  →  E  The one star in our solar system; Earth  →  C  A rocky planet that orbits the Sun; Jupiter  →  B  A giant planet made mostly of gas; Pluto  →  D  A dwarf planet; The Moon  →  A  A natural satellite of the Earth. The Sun is our only star; Earth is one of the four rocky inner planets; Jupiter is a gas giant; Pluto is a dwarf planet; the Moon is a natural satellite.
-Source of this question: module 3 task ("Who's who in the solar system") from the manifest.
+Question: How many stars are there in our solar system?
+Answer: A   One. There is one star, the Sun. The planets orbit it; they are not stars.
+Source of this question: gate item 1 re-asked (options rotated) — this chapter has no third quick-check module.
+The ebook also holds task 3, "Who's who in the solar system", for homework or the next lesson's do now.
 Sort the slips: correct → ready to move on; incorrect → start next lesson in the pre-teach group, with the read-along and the Support lane. Same destination next time.</a:t>
             </a:r>
             <a:endParaRPr lang="en-US" dirty="0"/>
@@ -1415,7 +1416,7 @@
             <a:r>
               <a:rPr lang="en-US" dirty="0"/>
               <a:t>Answers — task 2: Why the Sun stays the same size. Reveal the answer; pupils mark their own work in a different colour, then read the "why" together. Same destination for every lane, so one answer serves the whole class.
-Answer: A   The inward pull of gravity is balanced by the outward pressure from fusion energy
+Answer: D   The inward pull of gravity is balanced by the outward pressure from fusion energy
 Why: In a main sequence star there is an equilibrium: gravitational collapse inwards is balanced by expansion outwards caused by the energy released by fusion.
 Ask a Support pupil to explain one step, and a Stretch pupil to share their extension.</a:t>
             </a:r>
@@ -1506,8 +1507,8 @@
             <a:r>
               <a:rPr lang="en-US" dirty="0"/>
               <a:t>Answers — exit ticket: Exit ticket. Reveal the answer; pupils mark their own work in a different colour, then read the "why" together. Same destination for every lane, so one answer serves the whole class.
-Answer: The Sun  →  E  The one star in our solar system; Earth  →  C  A rocky planet that orbits the Sun; Jupiter  →  B  A giant planet made mostly of gas; Pluto  →  D  A dwarf planet; The Moon  →  A  A natural satellite of the Earth
-Why: The Sun is our only star; Earth is one of the four rocky inner planets; Jupiter is a gas giant; Pluto is a dwarf planet; the Moon is a natural satellite.
+Answer: A   One
+Why: There is one star, the Sun. The planets orbit it; they are not stars.
 Ask a Support pupil to explain one step, and a Stretch pupil to share their extension.</a:t>
             </a:r>
             <a:endParaRPr lang="en-US" dirty="0"/>
@@ -1597,9 +1598,9 @@
             <a:r>
               <a:rPr lang="en-US" dirty="0"/>
               <a:t>Do now — retrieval. Silent, no notes, no help: recall comes before any support. Give about four minutes.
-1. How many stars are there in our solar system?  →  A   One
+1. How many stars are there in our solar system?  →  B   One
 2. The Sun formed from a cloud of dust and gas called a ___.  →  nebula
-3. Which force pulled the dust and gas together to form the Sun?  →  A   Gravity
+3. Which force pulled the dust and gas together to form the Sun?  →  D   Gravity
 Circulate: who gets 3/3 (Stretch route), 2/3 (Core), 0–1 (Support)? Use this to route pupils later in the lesson.</a:t>
             </a:r>
             <a:endParaRPr lang="en-US" dirty="0"/>
@@ -1689,9 +1690,9 @@
             <a:r>
               <a:rPr lang="en-US" dirty="0"/>
               <a:t>Answers — pupils mark their own in a different colour, then hands up for 3/3, 2/3, 1/3.
-1. A   One. There is one star, the Sun. The planets orbit it; they are not stars.
+1. B   One. There is one star, the Sun. The planets orbit it; they are not stars.
 2. nebula. A nebula is the cloud. A protostar is what forms when gravity pulls the cloud together.
-3. A   Gravity. Gravity attracts every piece of matter to every other piece, so it pulls the cloud together.
+3. D   Gravity. Gravity attracts every piece of matter to every other piece, so it pulls the cloud together.
 Say the route each score points to: 3/3 Stretch, 2/3 Core, 0–1 Support. Pupils may choose to move up.</a:t>
             </a:r>
             <a:endParaRPr lang="en-US" dirty="0"/>
@@ -7209,7 +7210,7 @@
                 <a:ea typeface="Calibri" pitchFamily="34" charset="-122"/>
                 <a:cs typeface="Calibri" pitchFamily="34" charset="-120"/>
               </a:rPr>
-              <a:t>The inward pull of gravity is balanced by the outward pressure from fusion energy</a:t>
+              <a:t>Fusion has stopped, so nothing inside the star is changing</a:t>
             </a:r>
             <a:endParaRPr lang="en-US" sz="2600" dirty="0"/>
           </a:p>
@@ -7246,7 +7247,7 @@
                 <a:ea typeface="Calibri" pitchFamily="34" charset="-122"/>
                 <a:cs typeface="Calibri" pitchFamily="34" charset="-120"/>
               </a:rPr>
-              <a:t>Fusion has stopped, so nothing inside the star is changing</a:t>
+              <a:t>The star has used up all of its hydrogen</a:t>
             </a:r>
             <a:endParaRPr lang="en-US" sz="2600" dirty="0"/>
           </a:p>
@@ -7320,7 +7321,7 @@
                 <a:ea typeface="Calibri" pitchFamily="34" charset="-122"/>
                 <a:cs typeface="Calibri" pitchFamily="34" charset="-120"/>
               </a:rPr>
-              <a:t>The star has used up all of its hydrogen</a:t>
+              <a:t>The inward pull of gravity is balanced by the outward pressure from fusion energy</a:t>
             </a:r>
             <a:endParaRPr lang="en-US" sz="2600" dirty="0"/>
           </a:p>
@@ -8660,7 +8661,7 @@
         <p:spPr>
           <a:xfrm>
             <a:off x="2286000" y="1664208"/>
-            <a:ext cx="7802575" cy="2660396"/>
+            <a:ext cx="7802575" cy="2243328"/>
           </a:xfrm>
           <a:prstGeom prst="rect">
             <a:avLst/>
@@ -8687,7 +8688,7 @@
                 <a:ea typeface="Calibri" pitchFamily="34" charset="-122"/>
                 <a:cs typeface="Calibri" pitchFamily="34" charset="-120"/>
               </a:rPr>
-              <a:t>Match each object to what it is.</a:t>
+              <a:t>How many stars are there in our solar system?</a:t>
             </a:r>
             <a:endParaRPr lang="en-US" sz="2400" dirty="0"/>
           </a:p>
@@ -8707,7 +8708,7 @@
                 <a:ea typeface="Calibri" pitchFamily="34" charset="-122"/>
                 <a:cs typeface="Calibri" pitchFamily="34" charset="-120"/>
               </a:rPr>
-              <a:t>1  </a:t>
+              <a:t>A   </a:t>
             </a:r>
             <a:pPr algn="l" indent="0" marL="0">
               <a:spcAft>
@@ -8724,8 +8725,11 @@
                 <a:ea typeface="Calibri" pitchFamily="34" charset="-122"/>
                 <a:cs typeface="Calibri" pitchFamily="34" charset="-120"/>
               </a:rPr>
-              <a:t>The Sun</a:t>
-            </a:r>
+              <a:t>One</a:t>
+            </a:r>
+            <a:endParaRPr lang="en-US" sz="2400" dirty="0"/>
+          </a:p>
+          <a:p>
             <a:pPr algn="l" indent="0" marL="0">
               <a:spcAft>
                 <a:spcPts val="600"/>
@@ -8733,7 +8737,7 @@
               <a:buNone/>
             </a:pPr>
             <a:r>
-              <a:rPr lang="en-US" sz="2200" dirty="0">
+              <a:rPr lang="en-US" sz="2200" b="1" dirty="0">
                 <a:solidFill>
                   <a:srgbClr val="B8862B"/>
                 </a:solidFill>
@@ -8741,7 +8745,7 @@
                 <a:ea typeface="Calibri" pitchFamily="34" charset="-122"/>
                 <a:cs typeface="Calibri" pitchFamily="34" charset="-120"/>
               </a:rPr>
-              <a:t>      ⟷      </a:t>
+              <a:t>B   </a:t>
             </a:r>
             <a:pPr algn="l" indent="0" marL="0">
               <a:spcAft>
@@ -8750,16 +8754,19 @@
               <a:buNone/>
             </a:pPr>
             <a:r>
-              <a:rPr lang="en-US" sz="2200" b="1" dirty="0">
-                <a:solidFill>
-                  <a:srgbClr val="B8862B"/>
-                </a:solidFill>
-                <a:latin typeface="Calibri" pitchFamily="34" charset="0"/>
-                <a:ea typeface="Calibri" pitchFamily="34" charset="-122"/>
-                <a:cs typeface="Calibri" pitchFamily="34" charset="-120"/>
-              </a:rPr>
-              <a:t>A  </a:t>
-            </a:r>
+              <a:rPr lang="en-US" sz="2200" dirty="0">
+                <a:solidFill>
+                  <a:srgbClr val="1E2229"/>
+                </a:solidFill>
+                <a:latin typeface="Calibri" pitchFamily="34" charset="0"/>
+                <a:ea typeface="Calibri" pitchFamily="34" charset="-122"/>
+                <a:cs typeface="Calibri" pitchFamily="34" charset="-120"/>
+              </a:rPr>
+              <a:t>Millions</a:t>
+            </a:r>
+            <a:endParaRPr lang="en-US" sz="2400" dirty="0"/>
+          </a:p>
+          <a:p>
             <a:pPr algn="l" indent="0" marL="0">
               <a:spcAft>
                 <a:spcPts val="600"/>
@@ -8767,19 +8774,16 @@
               <a:buNone/>
             </a:pPr>
             <a:r>
-              <a:rPr lang="en-US" sz="2200" dirty="0">
-                <a:solidFill>
-                  <a:srgbClr val="1E2229"/>
-                </a:solidFill>
-                <a:latin typeface="Calibri" pitchFamily="34" charset="0"/>
-                <a:ea typeface="Calibri" pitchFamily="34" charset="-122"/>
-                <a:cs typeface="Calibri" pitchFamily="34" charset="-120"/>
-              </a:rPr>
-              <a:t>A natural satellite of the Earth</a:t>
-            </a:r>
-            <a:endParaRPr lang="en-US" sz="2400" dirty="0"/>
-          </a:p>
-          <a:p>
+              <a:rPr lang="en-US" sz="2200" b="1" dirty="0">
+                <a:solidFill>
+                  <a:srgbClr val="B8862B"/>
+                </a:solidFill>
+                <a:latin typeface="Calibri" pitchFamily="34" charset="0"/>
+                <a:ea typeface="Calibri" pitchFamily="34" charset="-122"/>
+                <a:cs typeface="Calibri" pitchFamily="34" charset="-120"/>
+              </a:rPr>
+              <a:t>C   </a:t>
+            </a:r>
             <a:pPr algn="l" indent="0" marL="0">
               <a:spcAft>
                 <a:spcPts val="600"/>
@@ -8787,16 +8791,19 @@
               <a:buNone/>
             </a:pPr>
             <a:r>
-              <a:rPr lang="en-US" sz="2200" b="1" dirty="0">
-                <a:solidFill>
-                  <a:srgbClr val="B8862B"/>
-                </a:solidFill>
-                <a:latin typeface="Calibri" pitchFamily="34" charset="0"/>
-                <a:ea typeface="Calibri" pitchFamily="34" charset="-122"/>
-                <a:cs typeface="Calibri" pitchFamily="34" charset="-120"/>
-              </a:rPr>
-              <a:t>2  </a:t>
-            </a:r>
+              <a:rPr lang="en-US" sz="2200" dirty="0">
+                <a:solidFill>
+                  <a:srgbClr val="1E2229"/>
+                </a:solidFill>
+                <a:latin typeface="Calibri" pitchFamily="34" charset="0"/>
+                <a:ea typeface="Calibri" pitchFamily="34" charset="-122"/>
+                <a:cs typeface="Calibri" pitchFamily="34" charset="-120"/>
+              </a:rPr>
+              <a:t>Nine</a:t>
+            </a:r>
+            <a:endParaRPr lang="en-US" sz="2400" dirty="0"/>
+          </a:p>
+          <a:p>
             <a:pPr algn="l" indent="0" marL="0">
               <a:spcAft>
                 <a:spcPts val="600"/>
@@ -8804,15 +8811,15 @@
               <a:buNone/>
             </a:pPr>
             <a:r>
-              <a:rPr lang="en-US" sz="2200" dirty="0">
-                <a:solidFill>
-                  <a:srgbClr val="1E2229"/>
-                </a:solidFill>
-                <a:latin typeface="Calibri" pitchFamily="34" charset="0"/>
-                <a:ea typeface="Calibri" pitchFamily="34" charset="-122"/>
-                <a:cs typeface="Calibri" pitchFamily="34" charset="-120"/>
-              </a:rPr>
-              <a:t>Earth</a:t>
+              <a:rPr lang="en-US" sz="2200" b="1" dirty="0">
+                <a:solidFill>
+                  <a:srgbClr val="B8862B"/>
+                </a:solidFill>
+                <a:latin typeface="Calibri" pitchFamily="34" charset="0"/>
+                <a:ea typeface="Calibri" pitchFamily="34" charset="-122"/>
+                <a:cs typeface="Calibri" pitchFamily="34" charset="-120"/>
+              </a:rPr>
+              <a:t>D   </a:t>
             </a:r>
             <a:pPr algn="l" indent="0" marL="0">
               <a:spcAft>
@@ -8823,311 +8830,13 @@
             <a:r>
               <a:rPr lang="en-US" sz="2200" dirty="0">
                 <a:solidFill>
-                  <a:srgbClr val="B8862B"/>
-                </a:solidFill>
-                <a:latin typeface="Calibri" pitchFamily="34" charset="0"/>
-                <a:ea typeface="Calibri" pitchFamily="34" charset="-122"/>
-                <a:cs typeface="Calibri" pitchFamily="34" charset="-120"/>
-              </a:rPr>
-              <a:t>      ⟷      </a:t>
-            </a:r>
-            <a:pPr algn="l" indent="0" marL="0">
-              <a:spcAft>
-                <a:spcPts val="600"/>
-              </a:spcAft>
-              <a:buNone/>
-            </a:pPr>
-            <a:r>
-              <a:rPr lang="en-US" sz="2200" b="1" dirty="0">
-                <a:solidFill>
-                  <a:srgbClr val="B8862B"/>
-                </a:solidFill>
-                <a:latin typeface="Calibri" pitchFamily="34" charset="0"/>
-                <a:ea typeface="Calibri" pitchFamily="34" charset="-122"/>
-                <a:cs typeface="Calibri" pitchFamily="34" charset="-120"/>
-              </a:rPr>
-              <a:t>B  </a:t>
-            </a:r>
-            <a:pPr algn="l" indent="0" marL="0">
-              <a:spcAft>
-                <a:spcPts val="600"/>
-              </a:spcAft>
-              <a:buNone/>
-            </a:pPr>
-            <a:r>
-              <a:rPr lang="en-US" sz="2200" dirty="0">
-                <a:solidFill>
                   <a:srgbClr val="1E2229"/>
                 </a:solidFill>
                 <a:latin typeface="Calibri" pitchFamily="34" charset="0"/>
                 <a:ea typeface="Calibri" pitchFamily="34" charset="-122"/>
                 <a:cs typeface="Calibri" pitchFamily="34" charset="-120"/>
               </a:rPr>
-              <a:t>A giant planet made mostly of gas</a:t>
-            </a:r>
-            <a:endParaRPr lang="en-US" sz="2400" dirty="0"/>
-          </a:p>
-          <a:p>
-            <a:pPr algn="l" indent="0" marL="0">
-              <a:spcAft>
-                <a:spcPts val="600"/>
-              </a:spcAft>
-              <a:buNone/>
-            </a:pPr>
-            <a:r>
-              <a:rPr lang="en-US" sz="2200" b="1" dirty="0">
-                <a:solidFill>
-                  <a:srgbClr val="B8862B"/>
-                </a:solidFill>
-                <a:latin typeface="Calibri" pitchFamily="34" charset="0"/>
-                <a:ea typeface="Calibri" pitchFamily="34" charset="-122"/>
-                <a:cs typeface="Calibri" pitchFamily="34" charset="-120"/>
-              </a:rPr>
-              <a:t>3  </a:t>
-            </a:r>
-            <a:pPr algn="l" indent="0" marL="0">
-              <a:spcAft>
-                <a:spcPts val="600"/>
-              </a:spcAft>
-              <a:buNone/>
-            </a:pPr>
-            <a:r>
-              <a:rPr lang="en-US" sz="2200" dirty="0">
-                <a:solidFill>
-                  <a:srgbClr val="1E2229"/>
-                </a:solidFill>
-                <a:latin typeface="Calibri" pitchFamily="34" charset="0"/>
-                <a:ea typeface="Calibri" pitchFamily="34" charset="-122"/>
-                <a:cs typeface="Calibri" pitchFamily="34" charset="-120"/>
-              </a:rPr>
-              <a:t>Jupiter</a:t>
-            </a:r>
-            <a:pPr algn="l" indent="0" marL="0">
-              <a:spcAft>
-                <a:spcPts val="600"/>
-              </a:spcAft>
-              <a:buNone/>
-            </a:pPr>
-            <a:r>
-              <a:rPr lang="en-US" sz="2200" dirty="0">
-                <a:solidFill>
-                  <a:srgbClr val="B8862B"/>
-                </a:solidFill>
-                <a:latin typeface="Calibri" pitchFamily="34" charset="0"/>
-                <a:ea typeface="Calibri" pitchFamily="34" charset="-122"/>
-                <a:cs typeface="Calibri" pitchFamily="34" charset="-120"/>
-              </a:rPr>
-              <a:t>      ⟷      </a:t>
-            </a:r>
-            <a:pPr algn="l" indent="0" marL="0">
-              <a:spcAft>
-                <a:spcPts val="600"/>
-              </a:spcAft>
-              <a:buNone/>
-            </a:pPr>
-            <a:r>
-              <a:rPr lang="en-US" sz="2200" b="1" dirty="0">
-                <a:solidFill>
-                  <a:srgbClr val="B8862B"/>
-                </a:solidFill>
-                <a:latin typeface="Calibri" pitchFamily="34" charset="0"/>
-                <a:ea typeface="Calibri" pitchFamily="34" charset="-122"/>
-                <a:cs typeface="Calibri" pitchFamily="34" charset="-120"/>
-              </a:rPr>
-              <a:t>C  </a:t>
-            </a:r>
-            <a:pPr algn="l" indent="0" marL="0">
-              <a:spcAft>
-                <a:spcPts val="600"/>
-              </a:spcAft>
-              <a:buNone/>
-            </a:pPr>
-            <a:r>
-              <a:rPr lang="en-US" sz="2200" dirty="0">
-                <a:solidFill>
-                  <a:srgbClr val="1E2229"/>
-                </a:solidFill>
-                <a:latin typeface="Calibri" pitchFamily="34" charset="0"/>
-                <a:ea typeface="Calibri" pitchFamily="34" charset="-122"/>
-                <a:cs typeface="Calibri" pitchFamily="34" charset="-120"/>
-              </a:rPr>
-              <a:t>A rocky planet that orbits the Sun</a:t>
-            </a:r>
-            <a:endParaRPr lang="en-US" sz="2400" dirty="0"/>
-          </a:p>
-          <a:p>
-            <a:pPr algn="l" indent="0" marL="0">
-              <a:spcAft>
-                <a:spcPts val="600"/>
-              </a:spcAft>
-              <a:buNone/>
-            </a:pPr>
-            <a:r>
-              <a:rPr lang="en-US" sz="2200" b="1" dirty="0">
-                <a:solidFill>
-                  <a:srgbClr val="B8862B"/>
-                </a:solidFill>
-                <a:latin typeface="Calibri" pitchFamily="34" charset="0"/>
-                <a:ea typeface="Calibri" pitchFamily="34" charset="-122"/>
-                <a:cs typeface="Calibri" pitchFamily="34" charset="-120"/>
-              </a:rPr>
-              <a:t>4  </a:t>
-            </a:r>
-            <a:pPr algn="l" indent="0" marL="0">
-              <a:spcAft>
-                <a:spcPts val="600"/>
-              </a:spcAft>
-              <a:buNone/>
-            </a:pPr>
-            <a:r>
-              <a:rPr lang="en-US" sz="2200" dirty="0">
-                <a:solidFill>
-                  <a:srgbClr val="1E2229"/>
-                </a:solidFill>
-                <a:latin typeface="Calibri" pitchFamily="34" charset="0"/>
-                <a:ea typeface="Calibri" pitchFamily="34" charset="-122"/>
-                <a:cs typeface="Calibri" pitchFamily="34" charset="-120"/>
-              </a:rPr>
-              <a:t>Pluto</a:t>
-            </a:r>
-            <a:pPr algn="l" indent="0" marL="0">
-              <a:spcAft>
-                <a:spcPts val="600"/>
-              </a:spcAft>
-              <a:buNone/>
-            </a:pPr>
-            <a:r>
-              <a:rPr lang="en-US" sz="2200" dirty="0">
-                <a:solidFill>
-                  <a:srgbClr val="B8862B"/>
-                </a:solidFill>
-                <a:latin typeface="Calibri" pitchFamily="34" charset="0"/>
-                <a:ea typeface="Calibri" pitchFamily="34" charset="-122"/>
-                <a:cs typeface="Calibri" pitchFamily="34" charset="-120"/>
-              </a:rPr>
-              <a:t>      ⟷      </a:t>
-            </a:r>
-            <a:pPr algn="l" indent="0" marL="0">
-              <a:spcAft>
-                <a:spcPts val="600"/>
-              </a:spcAft>
-              <a:buNone/>
-            </a:pPr>
-            <a:r>
-              <a:rPr lang="en-US" sz="2200" b="1" dirty="0">
-                <a:solidFill>
-                  <a:srgbClr val="B8862B"/>
-                </a:solidFill>
-                <a:latin typeface="Calibri" pitchFamily="34" charset="0"/>
-                <a:ea typeface="Calibri" pitchFamily="34" charset="-122"/>
-                <a:cs typeface="Calibri" pitchFamily="34" charset="-120"/>
-              </a:rPr>
-              <a:t>D  </a:t>
-            </a:r>
-            <a:pPr algn="l" indent="0" marL="0">
-              <a:spcAft>
-                <a:spcPts val="600"/>
-              </a:spcAft>
-              <a:buNone/>
-            </a:pPr>
-            <a:r>
-              <a:rPr lang="en-US" sz="2200" dirty="0">
-                <a:solidFill>
-                  <a:srgbClr val="1E2229"/>
-                </a:solidFill>
-                <a:latin typeface="Calibri" pitchFamily="34" charset="0"/>
-                <a:ea typeface="Calibri" pitchFamily="34" charset="-122"/>
-                <a:cs typeface="Calibri" pitchFamily="34" charset="-120"/>
-              </a:rPr>
-              <a:t>A dwarf planet</a:t>
-            </a:r>
-            <a:endParaRPr lang="en-US" sz="2400" dirty="0"/>
-          </a:p>
-          <a:p>
-            <a:pPr algn="l" indent="0" marL="0">
-              <a:spcAft>
-                <a:spcPts val="600"/>
-              </a:spcAft>
-              <a:buNone/>
-            </a:pPr>
-            <a:r>
-              <a:rPr lang="en-US" sz="2200" b="1" dirty="0">
-                <a:solidFill>
-                  <a:srgbClr val="B8862B"/>
-                </a:solidFill>
-                <a:latin typeface="Calibri" pitchFamily="34" charset="0"/>
-                <a:ea typeface="Calibri" pitchFamily="34" charset="-122"/>
-                <a:cs typeface="Calibri" pitchFamily="34" charset="-120"/>
-              </a:rPr>
-              <a:t>5  </a:t>
-            </a:r>
-            <a:pPr algn="l" indent="0" marL="0">
-              <a:spcAft>
-                <a:spcPts val="600"/>
-              </a:spcAft>
-              <a:buNone/>
-            </a:pPr>
-            <a:r>
-              <a:rPr lang="en-US" sz="2200" dirty="0">
-                <a:solidFill>
-                  <a:srgbClr val="1E2229"/>
-                </a:solidFill>
-                <a:latin typeface="Calibri" pitchFamily="34" charset="0"/>
-                <a:ea typeface="Calibri" pitchFamily="34" charset="-122"/>
-                <a:cs typeface="Calibri" pitchFamily="34" charset="-120"/>
-              </a:rPr>
-              <a:t>The Moon</a:t>
-            </a:r>
-            <a:pPr algn="l" indent="0" marL="0">
-              <a:spcAft>
-                <a:spcPts val="600"/>
-              </a:spcAft>
-              <a:buNone/>
-            </a:pPr>
-            <a:r>
-              <a:rPr lang="en-US" sz="2200" dirty="0">
-                <a:solidFill>
-                  <a:srgbClr val="B8862B"/>
-                </a:solidFill>
-                <a:latin typeface="Calibri" pitchFamily="34" charset="0"/>
-                <a:ea typeface="Calibri" pitchFamily="34" charset="-122"/>
-                <a:cs typeface="Calibri" pitchFamily="34" charset="-120"/>
-              </a:rPr>
-              <a:t>      ⟷      </a:t>
-            </a:r>
-            <a:pPr algn="l" indent="0" marL="0">
-              <a:spcAft>
-                <a:spcPts val="600"/>
-              </a:spcAft>
-              <a:buNone/>
-            </a:pPr>
-            <a:r>
-              <a:rPr lang="en-US" sz="2200" b="1" dirty="0">
-                <a:solidFill>
-                  <a:srgbClr val="B8862B"/>
-                </a:solidFill>
-                <a:latin typeface="Calibri" pitchFamily="34" charset="0"/>
-                <a:ea typeface="Calibri" pitchFamily="34" charset="-122"/>
-                <a:cs typeface="Calibri" pitchFamily="34" charset="-120"/>
-              </a:rPr>
-              <a:t>E  </a:t>
-            </a:r>
-            <a:pPr algn="l" indent="0" marL="0">
-              <a:spcAft>
-                <a:spcPts val="600"/>
-              </a:spcAft>
-              <a:buNone/>
-            </a:pPr>
-            <a:r>
-              <a:rPr lang="en-US" sz="2200" dirty="0">
-                <a:solidFill>
-                  <a:srgbClr val="1E2229"/>
-                </a:solidFill>
-                <a:latin typeface="Calibri" pitchFamily="34" charset="0"/>
-                <a:ea typeface="Calibri" pitchFamily="34" charset="-122"/>
-                <a:cs typeface="Calibri" pitchFamily="34" charset="-120"/>
-              </a:rPr>
-              <a:t>The one star in our solar system</a:t>
+              <a:t>Eight</a:t>
             </a:r>
             <a:endParaRPr lang="en-US" sz="2400" dirty="0"/>
           </a:p>
@@ -9141,12 +8850,12 @@
         </p:nvSpPr>
         <p:spPr>
           <a:xfrm>
-            <a:off x="2286000" y="5184648"/>
-            <a:ext cx="7619695" cy="685800"/>
+            <a:off x="2286000" y="5047488"/>
+            <a:ext cx="7619695" cy="822960"/>
           </a:xfrm>
           <a:prstGeom prst="roundRect">
             <a:avLst>
-              <a:gd name="adj" fmla="val 13333"/>
+              <a:gd name="adj" fmla="val 11111"/>
             </a:avLst>
           </a:prstGeom>
           <a:solidFill>
@@ -9168,8 +8877,8 @@
         </p:nvSpPr>
         <p:spPr>
           <a:xfrm>
-            <a:off x="2423160" y="5184648"/>
-            <a:ext cx="2926080" cy="685800"/>
+            <a:off x="2423160" y="5047488"/>
+            <a:ext cx="2926080" cy="822960"/>
           </a:xfrm>
           <a:prstGeom prst="rect">
             <a:avLst/>
@@ -10139,7 +9848,7 @@
                 <a:ea typeface="Cambria" pitchFamily="34" charset="-122"/>
                 <a:cs typeface="Cambria" pitchFamily="34" charset="-120"/>
               </a:rPr>
-              <a:t>A   The inward pull of gravity is balanced by the outward pressure from fusion energy</a:t>
+              <a:t>D   The inward pull of gravity is balanced by the outward pressure from fusion energy</a:t>
             </a:r>
             <a:endParaRPr lang="en-US" sz="1800" dirty="0"/>
           </a:p>
@@ -10563,192 +10272,44 @@
           <a:ln/>
         </p:spPr>
         <p:txBody>
-          <a:bodyPr wrap="square" lIns="63500" tIns="63500" rIns="63500" bIns="63500" rtlCol="0" anchor="t"/>
+          <a:bodyPr wrap="square" lIns="63500" tIns="63500" rIns="63500" bIns="63500" rtlCol="0" anchor="ctr"/>
           <a:lstStyle/>
           <a:p>
             <a:pPr algn="l" indent="0" marL="0">
               <a:spcAft>
-                <a:spcPts val="1000"/>
+                <a:spcPts val="1400"/>
               </a:spcAft>
               <a:buNone/>
             </a:pPr>
             <a:r>
-              <a:rPr lang="en-US" sz="2200" b="1" dirty="0">
-                <a:solidFill>
-                  <a:srgbClr val="815E1E"/>
-                </a:solidFill>
-                <a:latin typeface="Calibri" pitchFamily="34" charset="0"/>
-                <a:ea typeface="Calibri" pitchFamily="34" charset="-122"/>
-                <a:cs typeface="Calibri" pitchFamily="34" charset="-120"/>
-              </a:rPr>
-              <a:t>1  </a:t>
-            </a:r>
-            <a:pPr algn="l" indent="0" marL="0">
-              <a:spcAft>
-                <a:spcPts val="1000"/>
-              </a:spcAft>
-              <a:buNone/>
-            </a:pPr>
-            <a:r>
-              <a:rPr lang="en-US" sz="2200" dirty="0">
+              <a:rPr lang="en-US" sz="1800" dirty="0">
+                <a:solidFill>
+                  <a:srgbClr val="4A505C"/>
+                </a:solidFill>
+                <a:latin typeface="Calibri" pitchFamily="34" charset="0"/>
+                <a:ea typeface="Calibri" pitchFamily="34" charset="-122"/>
+                <a:cs typeface="Calibri" pitchFamily="34" charset="-120"/>
+              </a:rPr>
+              <a:t>How many stars are there in our solar system?</a:t>
+            </a:r>
+            <a:endParaRPr lang="en-US" sz="1800" dirty="0"/>
+          </a:p>
+          <a:p>
+            <a:pPr algn="l" indent="0" marL="0">
+              <a:buNone/>
+            </a:pPr>
+            <a:r>
+              <a:rPr lang="en-US" sz="3200" b="1" dirty="0">
                 <a:solidFill>
                   <a:srgbClr val="1E2229"/>
                 </a:solidFill>
-                <a:latin typeface="Calibri" pitchFamily="34" charset="0"/>
-                <a:ea typeface="Calibri" pitchFamily="34" charset="-122"/>
-                <a:cs typeface="Calibri" pitchFamily="34" charset="-120"/>
-              </a:rPr>
-              <a:t>The Sun  →  E  The one star in our solar system</a:t>
-            </a:r>
-            <a:endParaRPr lang="en-US" sz="2200" dirty="0"/>
-          </a:p>
-          <a:p>
-            <a:pPr algn="l" indent="0" marL="0">
-              <a:spcAft>
-                <a:spcPts val="1000"/>
-              </a:spcAft>
-              <a:buNone/>
-            </a:pPr>
-            <a:r>
-              <a:rPr lang="en-US" sz="2200" b="1" dirty="0">
-                <a:solidFill>
-                  <a:srgbClr val="815E1E"/>
-                </a:solidFill>
-                <a:latin typeface="Calibri" pitchFamily="34" charset="0"/>
-                <a:ea typeface="Calibri" pitchFamily="34" charset="-122"/>
-                <a:cs typeface="Calibri" pitchFamily="34" charset="-120"/>
-              </a:rPr>
-              <a:t>2  </a:t>
-            </a:r>
-            <a:pPr algn="l" indent="0" marL="0">
-              <a:spcAft>
-                <a:spcPts val="1000"/>
-              </a:spcAft>
-              <a:buNone/>
-            </a:pPr>
-            <a:r>
-              <a:rPr lang="en-US" sz="2200" dirty="0">
-                <a:solidFill>
-                  <a:srgbClr val="1E2229"/>
-                </a:solidFill>
-                <a:latin typeface="Calibri" pitchFamily="34" charset="0"/>
-                <a:ea typeface="Calibri" pitchFamily="34" charset="-122"/>
-                <a:cs typeface="Calibri" pitchFamily="34" charset="-120"/>
-              </a:rPr>
-              <a:t>Earth  →  C  A rocky planet that orbits the Sun</a:t>
-            </a:r>
-            <a:endParaRPr lang="en-US" sz="2200" dirty="0"/>
-          </a:p>
-          <a:p>
-            <a:pPr algn="l" indent="0" marL="0">
-              <a:spcAft>
-                <a:spcPts val="1000"/>
-              </a:spcAft>
-              <a:buNone/>
-            </a:pPr>
-            <a:r>
-              <a:rPr lang="en-US" sz="2200" b="1" dirty="0">
-                <a:solidFill>
-                  <a:srgbClr val="815E1E"/>
-                </a:solidFill>
-                <a:latin typeface="Calibri" pitchFamily="34" charset="0"/>
-                <a:ea typeface="Calibri" pitchFamily="34" charset="-122"/>
-                <a:cs typeface="Calibri" pitchFamily="34" charset="-120"/>
-              </a:rPr>
-              <a:t>3  </a:t>
-            </a:r>
-            <a:pPr algn="l" indent="0" marL="0">
-              <a:spcAft>
-                <a:spcPts val="1000"/>
-              </a:spcAft>
-              <a:buNone/>
-            </a:pPr>
-            <a:r>
-              <a:rPr lang="en-US" sz="2200" dirty="0">
-                <a:solidFill>
-                  <a:srgbClr val="1E2229"/>
-                </a:solidFill>
-                <a:latin typeface="Calibri" pitchFamily="34" charset="0"/>
-                <a:ea typeface="Calibri" pitchFamily="34" charset="-122"/>
-                <a:cs typeface="Calibri" pitchFamily="34" charset="-120"/>
-              </a:rPr>
-              <a:t>Jupiter  →  B  A giant planet made mostly of gas</a:t>
-            </a:r>
-            <a:endParaRPr lang="en-US" sz="2200" dirty="0"/>
-          </a:p>
-          <a:p>
-            <a:pPr algn="l" indent="0" marL="0">
-              <a:spcAft>
-                <a:spcPts val="1000"/>
-              </a:spcAft>
-              <a:buNone/>
-            </a:pPr>
-            <a:r>
-              <a:rPr lang="en-US" sz="2200" b="1" dirty="0">
-                <a:solidFill>
-                  <a:srgbClr val="815E1E"/>
-                </a:solidFill>
-                <a:latin typeface="Calibri" pitchFamily="34" charset="0"/>
-                <a:ea typeface="Calibri" pitchFamily="34" charset="-122"/>
-                <a:cs typeface="Calibri" pitchFamily="34" charset="-120"/>
-              </a:rPr>
-              <a:t>4  </a:t>
-            </a:r>
-            <a:pPr algn="l" indent="0" marL="0">
-              <a:spcAft>
-                <a:spcPts val="1000"/>
-              </a:spcAft>
-              <a:buNone/>
-            </a:pPr>
-            <a:r>
-              <a:rPr lang="en-US" sz="2200" dirty="0">
-                <a:solidFill>
-                  <a:srgbClr val="1E2229"/>
-                </a:solidFill>
-                <a:latin typeface="Calibri" pitchFamily="34" charset="0"/>
-                <a:ea typeface="Calibri" pitchFamily="34" charset="-122"/>
-                <a:cs typeface="Calibri" pitchFamily="34" charset="-120"/>
-              </a:rPr>
-              <a:t>Pluto  →  D  A dwarf planet</a:t>
-            </a:r>
-            <a:endParaRPr lang="en-US" sz="2200" dirty="0"/>
-          </a:p>
-          <a:p>
-            <a:pPr algn="l" indent="0" marL="0">
-              <a:spcAft>
-                <a:spcPts val="1000"/>
-              </a:spcAft>
-              <a:buNone/>
-            </a:pPr>
-            <a:r>
-              <a:rPr lang="en-US" sz="2200" b="1" dirty="0">
-                <a:solidFill>
-                  <a:srgbClr val="815E1E"/>
-                </a:solidFill>
-                <a:latin typeface="Calibri" pitchFamily="34" charset="0"/>
-                <a:ea typeface="Calibri" pitchFamily="34" charset="-122"/>
-                <a:cs typeface="Calibri" pitchFamily="34" charset="-120"/>
-              </a:rPr>
-              <a:t>5  </a:t>
-            </a:r>
-            <a:pPr algn="l" indent="0" marL="0">
-              <a:spcAft>
-                <a:spcPts val="1000"/>
-              </a:spcAft>
-              <a:buNone/>
-            </a:pPr>
-            <a:r>
-              <a:rPr lang="en-US" sz="2200" dirty="0">
-                <a:solidFill>
-                  <a:srgbClr val="1E2229"/>
-                </a:solidFill>
-                <a:latin typeface="Calibri" pitchFamily="34" charset="0"/>
-                <a:ea typeface="Calibri" pitchFamily="34" charset="-122"/>
-                <a:cs typeface="Calibri" pitchFamily="34" charset="-120"/>
-              </a:rPr>
-              <a:t>The Moon  →  A  A natural satellite of the Earth</a:t>
-            </a:r>
-            <a:endParaRPr lang="en-US" sz="2200" dirty="0"/>
+                <a:latin typeface="Cambria" pitchFamily="34" charset="0"/>
+                <a:ea typeface="Cambria" pitchFamily="34" charset="-122"/>
+                <a:cs typeface="Cambria" pitchFamily="34" charset="-120"/>
+              </a:rPr>
+              <a:t>A   One</a:t>
+            </a:r>
+            <a:endParaRPr lang="en-US" sz="1800" dirty="0"/>
           </a:p>
         </p:txBody>
       </p:sp>
@@ -10866,7 +10427,7 @@
                 <a:ea typeface="Calibri" pitchFamily="34" charset="-122"/>
                 <a:cs typeface="Calibri" pitchFamily="34" charset="-120"/>
               </a:rPr>
-              <a:t>The Sun is our only star; Earth is one of the four rocky inner planets; Jupiter is a gas giant; Pluto is a dwarf planet; the Moon is a natural satellite.</a:t>
+              <a:t>There is one star, the Sun. The planets orbit it; they are not stars.</a:t>
             </a:r>
             <a:endParaRPr lang="en-US" sz="2400" dirty="0"/>
           </a:p>
@@ -11280,7 +10841,7 @@
                 <a:ea typeface="Calibri" pitchFamily="34" charset="-122"/>
                 <a:cs typeface="Calibri" pitchFamily="34" charset="-120"/>
               </a:rPr>
-              <a:t>One</a:t>
+              <a:t>Eight</a:t>
             </a:r>
             <a:endParaRPr lang="en-US" sz="2400" dirty="0"/>
           </a:p>
@@ -11317,7 +10878,7 @@
                 <a:ea typeface="Calibri" pitchFamily="34" charset="-122"/>
                 <a:cs typeface="Calibri" pitchFamily="34" charset="-120"/>
               </a:rPr>
-              <a:t>Eight</a:t>
+              <a:t>One</a:t>
             </a:r>
             <a:endParaRPr lang="en-US" sz="2400" dirty="0"/>
           </a:p>
@@ -11354,7 +10915,7 @@
                 <a:ea typeface="Calibri" pitchFamily="34" charset="-122"/>
                 <a:cs typeface="Calibri" pitchFamily="34" charset="-120"/>
               </a:rPr>
-              <a:t>Nine</a:t>
+              <a:t>Millions</a:t>
             </a:r>
             <a:endParaRPr lang="en-US" sz="2400" dirty="0"/>
           </a:p>
@@ -11391,7 +10952,7 @@
                 <a:ea typeface="Calibri" pitchFamily="34" charset="-122"/>
                 <a:cs typeface="Calibri" pitchFamily="34" charset="-120"/>
               </a:rPr>
-              <a:t>Millions</a:t>
+              <a:t>Nine</a:t>
             </a:r>
             <a:endParaRPr lang="en-US" sz="2400" dirty="0"/>
           </a:p>
@@ -11793,7 +11354,7 @@
                 <a:ea typeface="Calibri" pitchFamily="34" charset="-122"/>
                 <a:cs typeface="Calibri" pitchFamily="34" charset="-120"/>
               </a:rPr>
-              <a:t>Gravity</a:t>
+              <a:t>Friction</a:t>
             </a:r>
             <a:endParaRPr lang="en-US" sz="2400" dirty="0"/>
           </a:p>
@@ -11830,7 +11391,7 @@
                 <a:ea typeface="Calibri" pitchFamily="34" charset="-122"/>
                 <a:cs typeface="Calibri" pitchFamily="34" charset="-120"/>
               </a:rPr>
-              <a:t>Magnetism</a:t>
+              <a:t>Fusion</a:t>
             </a:r>
             <a:endParaRPr lang="en-US" sz="2400" dirty="0"/>
           </a:p>
@@ -11867,7 +11428,7 @@
                 <a:ea typeface="Calibri" pitchFamily="34" charset="-122"/>
                 <a:cs typeface="Calibri" pitchFamily="34" charset="-120"/>
               </a:rPr>
-              <a:t>Friction</a:t>
+              <a:t>Magnetism</a:t>
             </a:r>
             <a:endParaRPr lang="en-US" sz="2400" dirty="0"/>
           </a:p>
@@ -11904,7 +11465,7 @@
                 <a:ea typeface="Calibri" pitchFamily="34" charset="-122"/>
                 <a:cs typeface="Calibri" pitchFamily="34" charset="-120"/>
               </a:rPr>
-              <a:t>Fusion</a:t>
+              <a:t>Gravity</a:t>
             </a:r>
             <a:endParaRPr lang="en-US" sz="2400" dirty="0"/>
           </a:p>
@@ -12305,7 +11866,7 @@
                 <a:ea typeface="Calibri" pitchFamily="34" charset="-122"/>
                 <a:cs typeface="Calibri" pitchFamily="34" charset="-120"/>
               </a:rPr>
-              <a:t>A   One</a:t>
+              <a:t>B   One</a:t>
             </a:r>
             <a:endParaRPr lang="en-US" sz="2200" dirty="0"/>
           </a:p>
@@ -12805,7 +12366,7 @@
                 <a:ea typeface="Calibri" pitchFamily="34" charset="-122"/>
                 <a:cs typeface="Calibri" pitchFamily="34" charset="-120"/>
               </a:rPr>
-              <a:t>A   Gravity</a:t>
+              <a:t>D   Gravity</a:t>
             </a:r>
             <a:endParaRPr lang="en-US" sz="2200" dirty="0"/>
           </a:p>

--- a/decks/triple-space/triple-space_ch1_solar-system.pptx
+++ b/decks/triple-space/triple-space_ch1_solar-system.pptx
@@ -125,30 +125,30 @@
   <p:extLst>
     <p:ext uri="{521415D9-36F7-43E2-AB2F-B90AF26B5E84}">
       <p14:sectionLst xmlns:p14="http://schemas.microsoft.com/office/powerpoint/2010/main">
-        <p14:section name="Opening" id="{553fb544-2ef1-1b1f-93ae-8d9fd8879055}">
+        <p14:section name="Opening" id="{635183e4-f0ba-560b-e81e-5c6272c2a92a}">
           <p14:sldIdLst>
             <p14:sldId id="256"/>
           </p14:sldIdLst>
         </p14:section>
-        <p14:section name="Gate" id="{2f4a5663-9a5e-21f2-082f-f1aed4f2395d}">
+        <p14:section name="Gate" id="{7d95b83a-666e-3625-6d3b-dc2c02e54722}">
           <p14:sldIdLst>
             <p14:sldId id="257"/>
             <p14:sldId id="258"/>
           </p14:sldIdLst>
         </p14:section>
-        <p14:section name="Pre-teach" id="{c601ee16-2c35-27b1-c34b-a75aad95bb61}">
+        <p14:section name="Pre-teach" id="{020e2fb0-f4e8-347d-64f8-342e25591280}">
           <p14:sldIdLst>
             <p14:sldId id="259"/>
             <p14:sldId id="260"/>
           </p14:sldIdLst>
         </p14:section>
-        <p14:section name="Read-along" id="{94f0cc32-feac-2b40-dac5-cd448848830a}">
+        <p14:section name="Read-along" id="{8b215993-5e8b-28da-215b-9fc4191ea73c}">
           <p14:sldIdLst>
             <p14:sldId id="261"/>
             <p14:sldId id="262"/>
           </p14:sldIdLst>
         </p14:section>
-        <p14:section name="Teach" id="{12d463d0-e654-2065-4635-66e1550a884f}">
+        <p14:section name="Teach" id="{b303d1e4-3b13-1e85-e66f-0e3fd5f697a8}">
           <p14:sldIdLst>
             <p14:sldId id="263"/>
             <p14:sldId id="264"/>
@@ -156,7 +156,7 @@
             <p14:sldId id="266"/>
           </p14:sldIdLst>
         </p14:section>
-        <p14:section name="Routes" id="{ae7a883b-24a8-206c-1a6d-64d7e6b5d21d}">
+        <p14:section name="Routes" id="{4ede7ee5-a492-9dd0-3e7b-d13f2883fb21}">
           <p14:sldIdLst>
             <p14:sldId id="267"/>
             <p14:sldId id="268"/>
@@ -164,12 +164,12 @@
             <p14:sldId id="270"/>
           </p14:sldIdLst>
         </p14:section>
-        <p14:section name="Close" id="{b1663b6c-c252-7241-9eaa-86ba7d28be4b}">
+        <p14:section name="Close" id="{29933e66-4743-9aad-c255-10eb58642935}">
           <p14:sldIdLst>
             <p14:sldId id="271"/>
           </p14:sldIdLst>
         </p14:section>
-        <p14:section name="Answers" id="{cd92ac39-3b4a-c756-778e-1908dc60bdc3}">
+        <p14:section name="Answers" id="{b5a27b5b-d769-9264-482d-1470cc523f3d}">
           <p14:sldIdLst>
             <p14:sldId id="272"/>
             <p14:sldId id="273"/>
